--- a/content/Lectures/Semester 1/Week 01 - Introduction to Operational Research/5 Source Files/Week 1 - Introduction to Operations Research.pptx
+++ b/content/Lectures/Semester 1/Week 01 - Introduction to Operational Research/5 Source Files/Week 1 - Introduction to Operations Research.pptx
@@ -16441,7 +16441,7 @@
                 </a:pPr>
                 <a:r>
                   <a:rPr lang="en-GB" sz="1800" dirty="0"/>
-                  <a:t>Sub (1) into (2)</a:t>
+                  <a:t>Sub (3) into (2)</a:t>
                 </a:r>
               </a:p>
               <a:p>
@@ -17830,7 +17830,7 @@
           <a:p>
             <a:r>
               <a:rPr lang="en-GB" dirty="0"/>
-              <a:t>Let’ start with a look at the module handbook.</a:t>
+              <a:t>Let’s start with a look at the module handbook.</a:t>
             </a:r>
           </a:p>
           <a:p>
@@ -23074,7 +23074,7 @@
                         <a:rPr lang="en-GB" b="0" i="1" smtClean="0">
                           <a:latin typeface="Cambria Math" panose="02040503050406030204" pitchFamily="18" charset="0"/>
                         </a:rPr>
-                        <m:t>=0</m:t>
+                        <m:t>=1</m:t>
                       </m:r>
                     </m:oMath>
                   </m:oMathPara>
@@ -23128,7 +23128,7 @@
                 </a:pPr>
                 <a:r>
                   <a:rPr lang="en-GB" dirty="0"/>
-                  <a:t>Has no solution! i.e. something that solves all equations simultaneously!</a:t>
+                  <a:t>Has no solution! i.e. no point solves all three equations simultaneously!</a:t>
                 </a:r>
               </a:p>
               <a:p>

--- a/content/Lectures/Semester 1/Week 01 - Introduction to Operational Research/5 Source Files/Week 1 - Introduction to Operations Research.pptx
+++ b/content/Lectures/Semester 1/Week 01 - Introduction to Operational Research/5 Source Files/Week 1 - Introduction to Operations Research.pptx
@@ -29427,7 +29427,7 @@
             </p:nvSpPr>
             <p:spPr>
               <a:xfrm>
-                <a:off x="8058919" y="5442588"/>
+                <a:off x="5678228" y="5072734"/>
                 <a:ext cx="890372" cy="369332"/>
               </a:xfrm>
               <a:prstGeom prst="rect">
@@ -29520,7 +29520,7 @@
             </p:nvSpPr>
             <p:spPr>
               <a:xfrm>
-                <a:off x="8058919" y="5442588"/>
+                <a:off x="5678228" y="5072734"/>
                 <a:ext cx="890372" cy="369332"/>
               </a:xfrm>
               <a:prstGeom prst="rect">
@@ -29569,7 +29569,7 @@
             </p:nvSpPr>
             <p:spPr>
               <a:xfrm>
-                <a:off x="5678228" y="5072734"/>
+                <a:off x="8058919" y="5442588"/>
                 <a:ext cx="895694" cy="369332"/>
               </a:xfrm>
               <a:prstGeom prst="rect">
@@ -29662,7 +29662,7 @@
             </p:nvSpPr>
             <p:spPr>
               <a:xfrm>
-                <a:off x="5678228" y="5072734"/>
+                <a:off x="8058919" y="5442588"/>
                 <a:ext cx="895694" cy="369332"/>
               </a:xfrm>
               <a:prstGeom prst="rect">

--- a/content/Lectures/Semester 1/Week 01 - Introduction to Operational Research/5 Source Files/Week 1 - Introduction to Operations Research.pptx
+++ b/content/Lectures/Semester 1/Week 01 - Introduction to Operational Research/5 Source Files/Week 1 - Introduction to Operations Research.pptx
@@ -6535,7 +6535,7 @@
           <a:p>
             <a:fld id="{3B41845A-6F72-4128-BACB-73A61169DAA5}" type="datetimeFigureOut">
               <a:rPr lang="en-GB" smtClean="0"/>
-              <a:t>25/09/2025</a:t>
+              <a:t>17/10/2026</a:t>
             </a:fld>
             <a:endParaRPr lang="en-GB"/>
           </a:p>
@@ -7018,7 +7018,7 @@
           <a:p>
             <a:fld id="{CCC7B19C-4FCD-43C2-9EC9-F2445BF2E6C6}" type="datetimeFigureOut">
               <a:rPr lang="en-GB" smtClean="0"/>
-              <a:t>25/09/2025</a:t>
+              <a:t>17/10/2026</a:t>
             </a:fld>
             <a:endParaRPr lang="en-GB"/>
           </a:p>
@@ -7188,7 +7188,7 @@
           <a:p>
             <a:fld id="{CCC7B19C-4FCD-43C2-9EC9-F2445BF2E6C6}" type="datetimeFigureOut">
               <a:rPr lang="en-GB" smtClean="0"/>
-              <a:t>25/09/2025</a:t>
+              <a:t>17/10/2026</a:t>
             </a:fld>
             <a:endParaRPr lang="en-GB"/>
           </a:p>
@@ -7368,7 +7368,7 @@
           <a:p>
             <a:fld id="{CCC7B19C-4FCD-43C2-9EC9-F2445BF2E6C6}" type="datetimeFigureOut">
               <a:rPr lang="en-GB" smtClean="0"/>
-              <a:t>25/09/2025</a:t>
+              <a:t>17/10/2026</a:t>
             </a:fld>
             <a:endParaRPr lang="en-GB"/>
           </a:p>
@@ -7538,7 +7538,7 @@
           <a:p>
             <a:fld id="{CCC7B19C-4FCD-43C2-9EC9-F2445BF2E6C6}" type="datetimeFigureOut">
               <a:rPr lang="en-GB" smtClean="0"/>
-              <a:t>25/09/2025</a:t>
+              <a:t>17/10/2026</a:t>
             </a:fld>
             <a:endParaRPr lang="en-GB"/>
           </a:p>
@@ -7784,7 +7784,7 @@
           <a:p>
             <a:fld id="{CCC7B19C-4FCD-43C2-9EC9-F2445BF2E6C6}" type="datetimeFigureOut">
               <a:rPr lang="en-GB" smtClean="0"/>
-              <a:t>25/09/2025</a:t>
+              <a:t>17/10/2026</a:t>
             </a:fld>
             <a:endParaRPr lang="en-GB"/>
           </a:p>
@@ -8016,7 +8016,7 @@
           <a:p>
             <a:fld id="{CCC7B19C-4FCD-43C2-9EC9-F2445BF2E6C6}" type="datetimeFigureOut">
               <a:rPr lang="en-GB" smtClean="0"/>
-              <a:t>25/09/2025</a:t>
+              <a:t>17/10/2026</a:t>
             </a:fld>
             <a:endParaRPr lang="en-GB"/>
           </a:p>
@@ -8383,7 +8383,7 @@
           <a:p>
             <a:fld id="{CCC7B19C-4FCD-43C2-9EC9-F2445BF2E6C6}" type="datetimeFigureOut">
               <a:rPr lang="en-GB" smtClean="0"/>
-              <a:t>25/09/2025</a:t>
+              <a:t>17/10/2026</a:t>
             </a:fld>
             <a:endParaRPr lang="en-GB"/>
           </a:p>
@@ -8501,7 +8501,7 @@
           <a:p>
             <a:fld id="{CCC7B19C-4FCD-43C2-9EC9-F2445BF2E6C6}" type="datetimeFigureOut">
               <a:rPr lang="en-GB" smtClean="0"/>
-              <a:t>25/09/2025</a:t>
+              <a:t>17/10/2026</a:t>
             </a:fld>
             <a:endParaRPr lang="en-GB"/>
           </a:p>
@@ -8596,7 +8596,7 @@
           <a:p>
             <a:fld id="{CCC7B19C-4FCD-43C2-9EC9-F2445BF2E6C6}" type="datetimeFigureOut">
               <a:rPr lang="en-GB" smtClean="0"/>
-              <a:t>25/09/2025</a:t>
+              <a:t>17/10/2026</a:t>
             </a:fld>
             <a:endParaRPr lang="en-GB"/>
           </a:p>
@@ -8873,7 +8873,7 @@
           <a:p>
             <a:fld id="{CCC7B19C-4FCD-43C2-9EC9-F2445BF2E6C6}" type="datetimeFigureOut">
               <a:rPr lang="en-GB" smtClean="0"/>
-              <a:t>25/09/2025</a:t>
+              <a:t>17/10/2026</a:t>
             </a:fld>
             <a:endParaRPr lang="en-GB"/>
           </a:p>
@@ -9130,7 +9130,7 @@
           <a:p>
             <a:fld id="{CCC7B19C-4FCD-43C2-9EC9-F2445BF2E6C6}" type="datetimeFigureOut">
               <a:rPr lang="en-GB" smtClean="0"/>
-              <a:t>25/09/2025</a:t>
+              <a:t>17/10/2026</a:t>
             </a:fld>
             <a:endParaRPr lang="en-GB"/>
           </a:p>
@@ -9343,7 +9343,7 @@
           <a:p>
             <a:fld id="{CCC7B19C-4FCD-43C2-9EC9-F2445BF2E6C6}" type="datetimeFigureOut">
               <a:rPr lang="en-GB" smtClean="0"/>
-              <a:t>25/09/2025</a:t>
+              <a:t>17/10/2026</a:t>
             </a:fld>
             <a:endParaRPr lang="en-GB"/>
           </a:p>
@@ -16247,8 +16247,8 @@
           </a:p>
         </p:txBody>
       </p:sp>
-      <mc:AlternateContent xmlns:mc="http://schemas.openxmlformats.org/markup-compatibility/2006" xmlns:a14="http://schemas.microsoft.com/office/drawing/2010/main">
-        <mc:Choice Requires="a14">
+      <mc:AlternateContent xmlns:mc="http://schemas.openxmlformats.org/markup-compatibility/2006">
+        <mc:Choice xmlns:a14="http://schemas.microsoft.com/office/drawing/2010/main" Requires="a14">
           <p:sp>
             <p:nvSpPr>
               <p:cNvPr id="3" name="Content Placeholder 2">
@@ -16753,7 +16753,7 @@
             </p:txBody>
           </p:sp>
         </mc:Choice>
-        <mc:Fallback xmlns="">
+        <mc:Fallback>
           <p:sp>
             <p:nvSpPr>
               <p:cNvPr id="3" name="Content Placeholder 2">
@@ -22954,8 +22954,8 @@
           </a:p>
         </p:txBody>
       </p:sp>
-      <mc:AlternateContent xmlns:mc="http://schemas.openxmlformats.org/markup-compatibility/2006" xmlns:a14="http://schemas.microsoft.com/office/drawing/2010/main">
-        <mc:Choice Requires="a14">
+      <mc:AlternateContent xmlns:mc="http://schemas.openxmlformats.org/markup-compatibility/2006">
+        <mc:Choice xmlns:a14="http://schemas.microsoft.com/office/drawing/2010/main" Requires="a14">
           <p:sp>
             <p:nvSpPr>
               <p:cNvPr id="3" name="Content Placeholder 2">
@@ -22975,7 +22975,7 @@
             <p:spPr/>
             <p:txBody>
               <a:bodyPr>
-                <a:normAutofit fontScale="92500"/>
+                <a:normAutofit/>
               </a:bodyPr>
               <a:lstStyle/>
               <a:p>
@@ -23140,7 +23140,7 @@
             </p:txBody>
           </p:sp>
         </mc:Choice>
-        <mc:Fallback xmlns="">
+        <mc:Fallback>
           <p:sp>
             <p:nvSpPr>
               <p:cNvPr id="3" name="Content Placeholder 2">
@@ -23161,7 +23161,7 @@
               <a:blipFill>
                 <a:blip r:embed="rId2"/>
                 <a:stretch>
-                  <a:fillRect l="-1043"/>
+                  <a:fillRect l="-1217" r="-522" b="-3081"/>
                 </a:stretch>
               </a:blipFill>
             </p:spPr>
